--- a/artifacts/speaking-portfolio-expanded/decks/dynamic-scaling-30min-screen.pptx
+++ b/artifacts/speaking-portfolio-expanded/decks/dynamic-scaling-30min-screen.pptx
@@ -769,6 +769,52 @@
                 <a:ea typeface="Arial"/>
                 <a:cs typeface="Arial"/>
               </a:rPr>
+              <a:t xml:space="preserve">A judge reads a thousand tokens and writes fifty. Run a council. Measure the disagreement.</a:t>
+            </a:r>
+            <a:endParaRPr lang="en-US" sz="1200"/>
+          </a:p>
+          <a:p>
+            <a:pPr marL="0" indent="0">
+              <a:lnSpc>
+                <a:spcPts val="1560"/>
+              </a:lnSpc>
+              <a:spcAft>
+                <a:spcPts val="0"/>
+              </a:spcAft>
+              <a:buNone/>
+            </a:pPr>
+            <a:r>
+              <a:rPr lang="en-US" sz="1200" b="0">
+                <a:solidFill>
+                  <a:srgbClr val="202b33"/>
+                </a:solidFill>
+                <a:latin typeface="Arial"/>
+                <a:ea typeface="Arial"/>
+                <a:cs typeface="Arial"/>
+              </a:rPr>
+              <a:t xml:space="preserve"/>
+            </a:r>
+            <a:endParaRPr lang="en-US" sz="1200"/>
+          </a:p>
+          <a:p>
+            <a:pPr marL="0" indent="0">
+              <a:lnSpc>
+                <a:spcPts val="1560"/>
+              </a:lnSpc>
+              <a:spcAft>
+                <a:spcPts val="0"/>
+              </a:spcAft>
+              <a:buNone/>
+            </a:pPr>
+            <a:r>
+              <a:rPr lang="en-US" sz="1200" b="0">
+                <a:solidFill>
+                  <a:srgbClr val="202b33"/>
+                </a:solidFill>
+                <a:latin typeface="Arial"/>
+                <a:ea typeface="Arial"/>
+                <a:cs typeface="Arial"/>
+              </a:rPr>
               <a:t xml:space="preserve">Gates before preferences; the judge may reject everyone</a:t>
             </a:r>
             <a:endParaRPr lang="en-US" sz="1200"/>
@@ -815,329 +861,329 @@
                 <a:ea typeface="Arial"/>
                 <a:cs typeface="Arial"/>
               </a:rPr>
-              <a:t xml:space="preserve">A synthesis is a new candidate</a:t>
-            </a:r>
-            <a:endParaRPr lang="en-US" sz="1200"/>
-          </a:p>
-          <a:p>
-            <a:pPr marL="0" indent="0">
-              <a:lnSpc>
-                <a:spcPts val="1560"/>
-              </a:lnSpc>
-              <a:spcAft>
-                <a:spcPts val="0"/>
-              </a:spcAft>
-              <a:buNone/>
-            </a:pPr>
-            <a:r>
-              <a:rPr lang="en-US" sz="1200" b="0">
-                <a:solidFill>
-                  <a:srgbClr val="202b33"/>
-                </a:solidFill>
-                <a:latin typeface="Arial"/>
-                <a:ea typeface="Arial"/>
-                <a:cs typeface="Arial"/>
-              </a:rPr>
-              <a:t xml:space="preserve"/>
-            </a:r>
-            <a:endParaRPr lang="en-US" sz="1200"/>
-          </a:p>
-          <a:p>
-            <a:pPr marL="0" indent="0">
-              <a:lnSpc>
-                <a:spcPts val="1560"/>
-              </a:lnSpc>
-              <a:spcAft>
-                <a:spcPts val="0"/>
-              </a:spcAft>
-              <a:buNone/>
-            </a:pPr>
-            <a:r>
-              <a:rPr lang="en-US" sz="1200" b="0">
-                <a:solidFill>
-                  <a:srgbClr val="202b33"/>
-                </a:solidFill>
-                <a:latin typeface="Arial"/>
-                <a:ea typeface="Arial"/>
-                <a:cs typeface="Arial"/>
-              </a:rPr>
-              <a:t xml:space="preserve">Change the unit of work from images to whole designs. Give the batch-job problem to three generated agents with the same requirements and different priorities: a minimalist, a maintainer, a security and performance reviewer. Keep first drafts separate so they do not converge on the first plausible answer. They can still share a blind spot; the contrast is the product.</a:t>
-            </a:r>
-            <a:endParaRPr lang="en-US" sz="1200"/>
-          </a:p>
-          <a:p>
-            <a:pPr marL="0" indent="0">
-              <a:lnSpc>
-                <a:spcPts val="1560"/>
-              </a:lnSpc>
-              <a:spcAft>
-                <a:spcPts val="0"/>
-              </a:spcAft>
-              <a:buNone/>
-            </a:pPr>
-            <a:r>
-              <a:rPr lang="en-US" sz="1200" b="0">
-                <a:solidFill>
-                  <a:srgbClr val="202b33"/>
-                </a:solidFill>
-                <a:latin typeface="Arial"/>
-                <a:ea typeface="Arial"/>
-                <a:cs typeface="Arial"/>
-              </a:rPr>
-              <a:t xml:space="preserve"/>
-            </a:r>
-            <a:endParaRPr lang="en-US" sz="1200"/>
-          </a:p>
-          <a:p>
-            <a:pPr marL="0" indent="0">
-              <a:lnSpc>
-                <a:spcPts val="1560"/>
-              </a:lnSpc>
-              <a:spcAft>
-                <a:spcPts val="0"/>
-              </a:spcAft>
-              <a:buNone/>
-            </a:pPr>
-            <a:r>
-              <a:rPr lang="en-US" sz="1200" b="0">
-                <a:solidFill>
-                  <a:srgbClr val="202b33"/>
-                </a:solidFill>
-                <a:latin typeface="Arial"/>
-                <a:ea typeface="Arial"/>
-                <a:cs typeface="Arial"/>
-              </a:rPr>
-              <a:t xml:space="preserve">That last part is not a hunch, and software engineering settled it forty years ago. Knight and Leveson ran the experiment in 1986: twenty-seven teams wrote the same program from the same specification, independently, and after a million tests the versions failed together far more often than independence predicts. Independently written does not mean independently wrong. Parallel attempts buy you contrast. They do not buy you coverage, and anyone selling you three-model consensus as a correctness argument is selling the assumption that experiment rejected.</a:t>
-            </a:r>
-            <a:endParaRPr lang="en-US" sz="1200"/>
-          </a:p>
-          <a:p>
-            <a:pPr marL="0" indent="0">
-              <a:lnSpc>
-                <a:spcPts val="1560"/>
-              </a:lnSpc>
-              <a:spcAft>
-                <a:spcPts val="0"/>
-              </a:spcAft>
-              <a:buNone/>
-            </a:pPr>
-            <a:r>
-              <a:rPr lang="en-US" sz="1200" b="0">
-                <a:solidFill>
-                  <a:srgbClr val="202b33"/>
-                </a:solidFill>
-                <a:latin typeface="Arial"/>
-                <a:ea typeface="Arial"/>
-                <a:cs typeface="Arial"/>
-              </a:rPr>
-              <a:t xml:space="preserve"/>
-            </a:r>
-            <a:endParaRPr lang="en-US" sz="1200"/>
-          </a:p>
-          <a:p>
-            <a:pPr marL="0" indent="0">
-              <a:lnSpc>
-                <a:spcPts val="1560"/>
-              </a:lnSpc>
-              <a:spcAft>
-                <a:spcPts val="0"/>
-              </a:spcAft>
-              <a:buNone/>
-            </a:pPr>
-            <a:r>
-              <a:rPr lang="en-US" sz="1200" b="0">
-                <a:solidFill>
-                  <a:srgbClr val="202b33"/>
-                </a:solidFill>
-                <a:latin typeface="Arial"/>
-                <a:ea typeface="Arial"/>
-                <a:cs typeface="Arial"/>
-              </a:rPr>
-              <a:t xml:space="preserve">Write the gates before reading the candidates: no duplicate dispatch after restart, no cross-tenant spend, no regeneration on notification retry, no dispatch after deadline. Run executable checks first. In the exercise every candidate fails a gate, including the careful one, which is the point: the judge is allowed to reject the room.</a:t>
-            </a:r>
-            <a:endParaRPr lang="en-US" sz="1200"/>
-          </a:p>
-          <a:p>
-            <a:pPr marL="0" indent="0">
-              <a:lnSpc>
-                <a:spcPts val="1560"/>
-              </a:lnSpc>
-              <a:spcAft>
-                <a:spcPts val="0"/>
-              </a:spcAft>
-              <a:buNone/>
-            </a:pPr>
-            <a:r>
-              <a:rPr lang="en-US" sz="1200" b="0">
-                <a:solidFill>
-                  <a:srgbClr val="202b33"/>
-                </a:solidFill>
-                <a:latin typeface="Arial"/>
-                <a:ea typeface="Arial"/>
-                <a:cs typeface="Arial"/>
-              </a:rPr>
-              <a:t xml:space="preserve"/>
-            </a:r>
-            <a:endParaRPr lang="en-US" sz="1200"/>
-          </a:p>
-          <a:p>
-            <a:pPr marL="0" indent="0">
-              <a:lnSpc>
-                <a:spcPts val="1560"/>
-              </a:lnSpc>
-              <a:spcAft>
-                <a:spcPts val="0"/>
-              </a:spcAft>
-              <a:buNone/>
-            </a:pPr>
-            <a:r>
-              <a:rPr lang="en-US" sz="1200" b="0">
-                <a:solidFill>
-                  <a:srgbClr val="202b33"/>
-                </a:solidFill>
-                <a:latin typeface="Arial"/>
-                <a:ea typeface="Arial"/>
-                <a:cs typeface="Arial"/>
-              </a:rPr>
-              <a:t xml:space="preserve">Then combine compatible ideas into a new candidate with one coherent set of assumptions and run the gates again. Passing parts do not make a passing whole. Stop at the review budget; an endless debate is an expensive way to not ship.</a:t>
-            </a:r>
-            <a:endParaRPr lang="en-US" sz="1200"/>
-          </a:p>
-          <a:p>
-            <a:pPr marL="0" indent="0">
-              <a:lnSpc>
-                <a:spcPts val="1560"/>
-              </a:lnSpc>
-              <a:spcAft>
-                <a:spcPts val="0"/>
-              </a:spcAft>
-              <a:buNone/>
-            </a:pPr>
-            <a:r>
-              <a:rPr lang="en-US" sz="1200" b="0">
-                <a:solidFill>
-                  <a:srgbClr val="202b33"/>
-                </a:solidFill>
-                <a:latin typeface="Arial"/>
-                <a:ea typeface="Arial"/>
-                <a:cs typeface="Arial"/>
-              </a:rPr>
-              <a:t xml:space="preserve"/>
-            </a:r>
-            <a:endParaRPr lang="en-US" sz="1200"/>
-          </a:p>
-          <a:p>
-            <a:pPr marL="0" indent="0">
-              <a:lnSpc>
-                <a:spcPts val="1560"/>
-              </a:lnSpc>
-              <a:spcAft>
-                <a:spcPts val="0"/>
-              </a:spcAft>
-              <a:buNone/>
-            </a:pPr>
-            <a:r>
-              <a:rPr lang="en-US" sz="1200" b="0">
-                <a:solidFill>
-                  <a:srgbClr val="202b33"/>
-                </a:solidFill>
-                <a:latin typeface="Arial"/>
-                <a:ea typeface="Arial"/>
-                <a:cs typeface="Arial"/>
-              </a:rPr>
-              <a:t xml:space="preserve">Knight and Leveson (1986), [An Experimental Evaluation of the Assumption of Independence in Multiversion Programming](https://doi.org/10.1109/TSE.1986.6312924), IEEE Transactions on Software Engineering SE-12(1), 96 to 109.</a:t>
-            </a:r>
-            <a:endParaRPr lang="en-US" sz="1200"/>
-          </a:p>
-          <a:p>
-            <a:pPr marL="0" indent="0">
-              <a:lnSpc>
-                <a:spcPts val="1560"/>
-              </a:lnSpc>
-              <a:spcAft>
-                <a:spcPts val="0"/>
-              </a:spcAft>
-              <a:buNone/>
-            </a:pPr>
-            <a:r>
-              <a:rPr lang="en-US" sz="1200" b="0">
-                <a:solidFill>
-                  <a:srgbClr val="202b33"/>
-                </a:solidFill>
-                <a:latin typeface="Arial"/>
-                <a:ea typeface="Arial"/>
-                <a:cs typeface="Arial"/>
-              </a:rPr>
-              <a:t xml:space="preserve"/>
-            </a:r>
-            <a:endParaRPr lang="en-US" sz="1200"/>
-          </a:p>
-          <a:p>
-            <a:pPr marL="0" indent="0">
-              <a:lnSpc>
-                <a:spcPts val="1560"/>
-              </a:lnSpc>
-              <a:spcAft>
-                <a:spcPts val="0"/>
-              </a:spcAft>
-              <a:buNone/>
-            </a:pPr>
-            <a:r>
-              <a:rPr lang="en-US" sz="1200" b="0">
-                <a:solidFill>
-                  <a:srgbClr val="202b33"/>
-                </a:solidFill>
-                <a:latin typeface="Arial"/>
-                <a:ea typeface="Arial"/>
-                <a:cs typeface="Arial"/>
-              </a:rPr>
-              <a:t xml:space="preserve"/>
-            </a:r>
-            <a:endParaRPr lang="en-US" sz="1200"/>
-          </a:p>
-          <a:p>
-            <a:pPr marL="0" indent="0">
-              <a:lnSpc>
-                <a:spcPts val="1560"/>
-              </a:lnSpc>
-              <a:spcAft>
-                <a:spcPts val="0"/>
-              </a:spcAft>
-              <a:buNone/>
-            </a:pPr>
-            <a:r>
-              <a:rPr lang="en-US" sz="1200" b="0">
-                <a:solidFill>
-                  <a:srgbClr val="202b33"/>
-                </a:solidFill>
-                <a:latin typeface="Arial"/>
-                <a:ea typeface="Arial"/>
-                <a:cs typeface="Arial"/>
-              </a:rPr>
-              <a:t xml:space="preserve"/>
-            </a:r>
-            <a:endParaRPr lang="en-US" sz="1200"/>
-          </a:p>
-          <a:p>
-            <a:pPr marL="0" indent="0">
-              <a:lnSpc>
-                <a:spcPts val="1560"/>
-              </a:lnSpc>
-              <a:spcAft>
-                <a:spcPts val="0"/>
-              </a:spcAft>
-              <a:buNone/>
-            </a:pPr>
-            <a:r>
-              <a:rPr lang="en-US" sz="1200" b="0">
-                <a:solidFill>
-                  <a:srgbClr val="202b33"/>
-                </a:solidFill>
-                <a:latin typeface="Arial"/>
-                <a:ea typeface="Arial"/>
-                <a:cs typeface="Arial"/>
-              </a:rPr>
-              <a:t xml:space="preserve">Score the three candidates in demo.md. Have the room find each candidate's failed gate before revealing it.</a:t>
+              <a:t xml:space="preserve">Change the unit of work from images to whole designs. Give the batch-job problem to three generated agents with the same requirements and different priorities: a minimalist, a maintainer, a security and performance reviewer. Keep first drafts separate so they do not converge on the first plausible answer. The contrast is the product.</a:t>
+            </a:r>
+            <a:endParaRPr lang="en-US" sz="1200"/>
+          </a:p>
+          <a:p>
+            <a:pPr marL="0" indent="0">
+              <a:lnSpc>
+                <a:spcPts val="1560"/>
+              </a:lnSpc>
+              <a:spcAft>
+                <a:spcPts val="0"/>
+              </a:spcAft>
+              <a:buNone/>
+            </a:pPr>
+            <a:r>
+              <a:rPr lang="en-US" sz="1200" b="0">
+                <a:solidFill>
+                  <a:srgbClr val="202b33"/>
+                </a:solidFill>
+                <a:latin typeface="Arial"/>
+                <a:ea typeface="Arial"/>
+                <a:cs typeface="Arial"/>
+              </a:rPr>
+              <a:t xml:space="preserve"/>
+            </a:r>
+            <a:endParaRPr lang="en-US" sz="1200"/>
+          </a:p>
+          <a:p>
+            <a:pPr marL="0" indent="0">
+              <a:lnSpc>
+                <a:spcPts val="1560"/>
+              </a:lnSpc>
+              <a:spcAft>
+                <a:spcPts val="0"/>
+              </a:spcAft>
+              <a:buNone/>
+            </a:pPr>
+            <a:r>
+              <a:rPr lang="en-US" sz="1200" b="0">
+                <a:solidFill>
+                  <a:srgbClr val="202b33"/>
+                </a:solidFill>
+                <a:latin typeface="Arial"/>
+                <a:ea typeface="Arial"/>
+                <a:cs typeface="Arial"/>
+              </a:rPr>
+              <a:t xml:space="preserve">Somebody is going to cite Knight and Leveson at me, so let me do it first. 1986, twenty-seven teams, one specification, a million tests, and the independently written versions failed together far more than independence predicts. True, important, and about N-version programming as a correctness strategy. That is not what this is. I am not voting three models toward the truth, and I am not going to tell you the ensemble is right because it agreed with itself. If that is the pitch you heard, it is not mine.</a:t>
+            </a:r>
+            <a:endParaRPr lang="en-US" sz="1200"/>
+          </a:p>
+          <a:p>
+            <a:pPr marL="0" indent="0">
+              <a:lnSpc>
+                <a:spcPts val="1560"/>
+              </a:lnSpc>
+              <a:spcAft>
+                <a:spcPts val="0"/>
+              </a:spcAft>
+              <a:buNone/>
+            </a:pPr>
+            <a:r>
+              <a:rPr lang="en-US" sz="1200" b="0">
+                <a:solidFill>
+                  <a:srgbClr val="202b33"/>
+                </a:solidFill>
+                <a:latin typeface="Arial"/>
+                <a:ea typeface="Arial"/>
+                <a:cs typeface="Arial"/>
+              </a:rPr>
+              <a:t xml:space="preserve"/>
+            </a:r>
+            <a:endParaRPr lang="en-US" sz="1200"/>
+          </a:p>
+          <a:p>
+            <a:pPr marL="0" indent="0">
+              <a:lnSpc>
+                <a:spcPts val="1560"/>
+              </a:lnSpc>
+              <a:spcAft>
+                <a:spcPts val="0"/>
+              </a:spcAft>
+              <a:buNone/>
+            </a:pPr>
+            <a:r>
+              <a:rPr lang="en-US" sz="1200" b="0">
+                <a:solidFill>
+                  <a:srgbClr val="202b33"/>
+                </a:solidFill>
+                <a:latin typeface="Arial"/>
+                <a:ea typeface="Arial"/>
+                <a:cs typeface="Arial"/>
+              </a:rPr>
+              <a:t xml:space="preserve">Here is what parallel attempts actually buy. Understanding of the models you depend on: run one brief through two of them and you learn what each reaches for and what each forgets. A migration harness: same brief, new model, diff the behavior before you switch, instead of after the incident. Better output: a synthesis of compatible ideas is often better than any single draft. And the cheap one, which is the one I care about: judging. A judge reads a thousand tokens and writes fifty. Output is what costs, so you can afford three or five judges from different models on every candidate, and the number you want back is not the average score. It is the disagreement. When the judges split or their reasons barely overlap, that candidate is sitting in territory nobody understands, and that is the one you do not ship on autopilot. I call this the Council of Guards. It picks between one and three alternatives to generate, and it costs a fraction of the generation it is guarding.</a:t>
+            </a:r>
+            <a:endParaRPr lang="en-US" sz="1200"/>
+          </a:p>
+          <a:p>
+            <a:pPr marL="0" indent="0">
+              <a:lnSpc>
+                <a:spcPts val="1560"/>
+              </a:lnSpc>
+              <a:spcAft>
+                <a:spcPts val="0"/>
+              </a:spcAft>
+              <a:buNone/>
+            </a:pPr>
+            <a:r>
+              <a:rPr lang="en-US" sz="1200" b="0">
+                <a:solidFill>
+                  <a:srgbClr val="202b33"/>
+                </a:solidFill>
+                <a:latin typeface="Arial"/>
+                <a:ea typeface="Arial"/>
+                <a:cs typeface="Arial"/>
+              </a:rPr>
+              <a:t xml:space="preserve"/>
+            </a:r>
+            <a:endParaRPr lang="en-US" sz="1200"/>
+          </a:p>
+          <a:p>
+            <a:pPr marL="0" indent="0">
+              <a:lnSpc>
+                <a:spcPts val="1560"/>
+              </a:lnSpc>
+              <a:spcAft>
+                <a:spcPts val="0"/>
+              </a:spcAft>
+              <a:buNone/>
+            </a:pPr>
+            <a:r>
+              <a:rPr lang="en-US" sz="1200" b="0">
+                <a:solidFill>
+                  <a:srgbClr val="202b33"/>
+                </a:solidFill>
+                <a:latin typeface="Arial"/>
+                <a:ea typeface="Arial"/>
+                <a:cs typeface="Arial"/>
+              </a:rPr>
+              <a:t xml:space="preserve">Write the gates before reading the candidates: no duplicate dispatch after restart, no cross-tenant spend, no regeneration on notification retry, no dispatch after deadline. Run executable checks first. In the exercise every candidate fails a gate, including the careful one, which is the point: the council is allowed to reject the room. Then combine compatible ideas into a new candidate with one coherent set of assumptions and run the gates again. Passing parts do not make a passing whole. Stop at the review budget; an endless debate is an expensive way to not ship.</a:t>
+            </a:r>
+            <a:endParaRPr lang="en-US" sz="1200"/>
+          </a:p>
+          <a:p>
+            <a:pPr marL="0" indent="0">
+              <a:lnSpc>
+                <a:spcPts val="1560"/>
+              </a:lnSpc>
+              <a:spcAft>
+                <a:spcPts val="0"/>
+              </a:spcAft>
+              <a:buNone/>
+            </a:pPr>
+            <a:r>
+              <a:rPr lang="en-US" sz="1200" b="0">
+                <a:solidFill>
+                  <a:srgbClr val="202b33"/>
+                </a:solidFill>
+                <a:latin typeface="Arial"/>
+                <a:ea typeface="Arial"/>
+                <a:cs typeface="Arial"/>
+              </a:rPr>
+              <a:t xml:space="preserve"/>
+            </a:r>
+            <a:endParaRPr lang="en-US" sz="1200"/>
+          </a:p>
+          <a:p>
+            <a:pPr marL="0" indent="0">
+              <a:lnSpc>
+                <a:spcPts val="1560"/>
+              </a:lnSpc>
+              <a:spcAft>
+                <a:spcPts val="0"/>
+              </a:spcAft>
+              <a:buNone/>
+            </a:pPr>
+            <a:r>
+              <a:rPr lang="en-US" sz="1200" b="0">
+                <a:solidFill>
+                  <a:srgbClr val="202b33"/>
+                </a:solidFill>
+                <a:latin typeface="Arial"/>
+                <a:ea typeface="Arial"/>
+                <a:cs typeface="Arial"/>
+              </a:rPr>
+              <a:t xml:space="preserve">None of this looks like the engineering we were raised on. Do not do the work twice. Do not spend compute speculatively. One right answer per ticket. Those were axioms when the expensive thing was the engineer. When the expensive thing is being wrong, and a second draft costs cents, doing it three times and reading what disagrees is the frugal move. I am not a shill for Big Token. I am telling you that cheaper, safer and faster now sometimes come from spending exactly where yesterday's wisdom told you not to.</a:t>
+            </a:r>
+            <a:endParaRPr lang="en-US" sz="1200"/>
+          </a:p>
+          <a:p>
+            <a:pPr marL="0" indent="0">
+              <a:lnSpc>
+                <a:spcPts val="1560"/>
+              </a:lnSpc>
+              <a:spcAft>
+                <a:spcPts val="0"/>
+              </a:spcAft>
+              <a:buNone/>
+            </a:pPr>
+            <a:r>
+              <a:rPr lang="en-US" sz="1200" b="0">
+                <a:solidFill>
+                  <a:srgbClr val="202b33"/>
+                </a:solidFill>
+                <a:latin typeface="Arial"/>
+                <a:ea typeface="Arial"/>
+                <a:cs typeface="Arial"/>
+              </a:rPr>
+              <a:t xml:space="preserve"/>
+            </a:r>
+            <a:endParaRPr lang="en-US" sz="1200"/>
+          </a:p>
+          <a:p>
+            <a:pPr marL="0" indent="0">
+              <a:lnSpc>
+                <a:spcPts val="1560"/>
+              </a:lnSpc>
+              <a:spcAft>
+                <a:spcPts val="0"/>
+              </a:spcAft>
+              <a:buNone/>
+            </a:pPr>
+            <a:r>
+              <a:rPr lang="en-US" sz="1200" b="0">
+                <a:solidFill>
+                  <a:srgbClr val="202b33"/>
+                </a:solidFill>
+                <a:latin typeface="Arial"/>
+                <a:ea typeface="Arial"/>
+                <a:cs typeface="Arial"/>
+              </a:rPr>
+              <a:t xml:space="preserve">Knight and Leveson (1986), [An Experimental Evaluation of the Assumption of Independence in Multiversion Programming](https://doi.org/10.1109/TSE.1986.6312924), IEEE Transactions on Software Engineering SE-12(1), 96 to 109. Cited to set aside: it is a result about redundancy as a correctness strategy, which this slide does not claim.</a:t>
+            </a:r>
+            <a:endParaRPr lang="en-US" sz="1200"/>
+          </a:p>
+          <a:p>
+            <a:pPr marL="0" indent="0">
+              <a:lnSpc>
+                <a:spcPts val="1560"/>
+              </a:lnSpc>
+              <a:spcAft>
+                <a:spcPts val="0"/>
+              </a:spcAft>
+              <a:buNone/>
+            </a:pPr>
+            <a:r>
+              <a:rPr lang="en-US" sz="1200" b="0">
+                <a:solidFill>
+                  <a:srgbClr val="202b33"/>
+                </a:solidFill>
+                <a:latin typeface="Arial"/>
+                <a:ea typeface="Arial"/>
+                <a:cs typeface="Arial"/>
+              </a:rPr>
+              <a:t xml:space="preserve"/>
+            </a:r>
+            <a:endParaRPr lang="en-US" sz="1200"/>
+          </a:p>
+          <a:p>
+            <a:pPr marL="0" indent="0">
+              <a:lnSpc>
+                <a:spcPts val="1560"/>
+              </a:lnSpc>
+              <a:spcAft>
+                <a:spcPts val="0"/>
+              </a:spcAft>
+              <a:buNone/>
+            </a:pPr>
+            <a:r>
+              <a:rPr lang="en-US" sz="1200" b="0">
+                <a:solidFill>
+                  <a:srgbClr val="202b33"/>
+                </a:solidFill>
+                <a:latin typeface="Arial"/>
+                <a:ea typeface="Arial"/>
+                <a:cs typeface="Arial"/>
+              </a:rPr>
+              <a:t xml:space="preserve"/>
+            </a:r>
+            <a:endParaRPr lang="en-US" sz="1200"/>
+          </a:p>
+          <a:p>
+            <a:pPr marL="0" indent="0">
+              <a:lnSpc>
+                <a:spcPts val="1560"/>
+              </a:lnSpc>
+              <a:spcAft>
+                <a:spcPts val="0"/>
+              </a:spcAft>
+              <a:buNone/>
+            </a:pPr>
+            <a:r>
+              <a:rPr lang="en-US" sz="1200" b="0">
+                <a:solidFill>
+                  <a:srgbClr val="202b33"/>
+                </a:solidFill>
+                <a:latin typeface="Arial"/>
+                <a:ea typeface="Arial"/>
+                <a:cs typeface="Arial"/>
+              </a:rPr>
+              <a:t xml:space="preserve"/>
+            </a:r>
+            <a:endParaRPr lang="en-US" sz="1200"/>
+          </a:p>
+          <a:p>
+            <a:pPr marL="0" indent="0">
+              <a:lnSpc>
+                <a:spcPts val="1560"/>
+              </a:lnSpc>
+              <a:spcAft>
+                <a:spcPts val="0"/>
+              </a:spcAft>
+              <a:buNone/>
+            </a:pPr>
+            <a:r>
+              <a:rPr lang="en-US" sz="1200" b="0">
+                <a:solidFill>
+                  <a:srgbClr val="202b33"/>
+                </a:solidFill>
+                <a:latin typeface="Arial"/>
+                <a:ea typeface="Arial"/>
+                <a:cs typeface="Arial"/>
+              </a:rPr>
+              <a:t xml:space="preserve">Score the three candidates in demo.md. Have the room find each candidate's failed gate before revealing it. Then show the council split per candidate: high agreement on the minimalist's failure, low overlap on the maintainer's, and ask which one deserves the human's afternoon.</a:t>
             </a:r>
             <a:endParaRPr lang="en-US" sz="1200"/>
           </a:p>
@@ -6694,7 +6740,7 @@
                 <a:ea typeface="Arial"/>
                 <a:cs typeface="Arial"/>
               </a:rPr>
-              <a:t xml:space="preserve">Attempts are a scaling axis too</a:t>
+              <a:t xml:space="preserve">Attempts are a scaling axis. So is judging.</a:t>
             </a:r>
             <a:endParaRPr lang="en-US" sz="3900"/>
           </a:p>

--- a/artifacts/speaking-portfolio-expanded/decks/dynamic-scaling-30min-screen.pptx
+++ b/artifacts/speaking-portfolio-expanded/decks/dynamic-scaling-30min-screen.pptx
@@ -677,99 +677,99 @@
                 <a:ea typeface="Arial"/>
                 <a:cs typeface="Arial"/>
               </a:rPr>
-              <a:t xml:space="preserve">Source slide 12. 22:00 to 25:30</a:t>
-            </a:r>
-            <a:endParaRPr lang="en-US" sz="1200"/>
-          </a:p>
-          <a:p>
-            <a:pPr marL="0" indent="0">
-              <a:lnSpc>
-                <a:spcPts val="1560"/>
-              </a:lnSpc>
-              <a:spcAft>
-                <a:spcPts val="0"/>
-              </a:spcAft>
-              <a:buNone/>
-            </a:pPr>
-            <a:r>
-              <a:rPr lang="en-US" sz="1200" b="0">
-                <a:solidFill>
-                  <a:srgbClr val="202b33"/>
-                </a:solidFill>
-                <a:latin typeface="Arial"/>
-                <a:ea typeface="Arial"/>
-                <a:cs typeface="Arial"/>
-              </a:rPr>
-              <a:t xml:space="preserve"/>
-            </a:r>
-            <a:endParaRPr lang="en-US" sz="1200"/>
-          </a:p>
-          <a:p>
-            <a:pPr marL="0" indent="0">
-              <a:lnSpc>
-                <a:spcPts val="1560"/>
-              </a:lnSpc>
-              <a:spcAft>
-                <a:spcPts val="0"/>
-              </a:spcAft>
-              <a:buNone/>
-            </a:pPr>
-            <a:r>
-              <a:rPr lang="en-US" sz="1200" b="0">
-                <a:solidFill>
-                  <a:srgbClr val="202b33"/>
-                </a:solidFill>
-                <a:latin typeface="Arial"/>
-                <a:ea typeface="Arial"/>
-                <a:cs typeface="Arial"/>
-              </a:rPr>
-              <a:t xml:space="preserve">Same brief, contrasting priorities, separate first drafts</a:t>
-            </a:r>
-            <a:endParaRPr lang="en-US" sz="1200"/>
-          </a:p>
-          <a:p>
-            <a:pPr marL="0" indent="0">
-              <a:lnSpc>
-                <a:spcPts val="1560"/>
-              </a:lnSpc>
-              <a:spcAft>
-                <a:spcPts val="0"/>
-              </a:spcAft>
-              <a:buNone/>
-            </a:pPr>
-            <a:r>
-              <a:rPr lang="en-US" sz="1200" b="0">
-                <a:solidFill>
-                  <a:srgbClr val="202b33"/>
-                </a:solidFill>
-                <a:latin typeface="Arial"/>
-                <a:ea typeface="Arial"/>
-                <a:cs typeface="Arial"/>
-              </a:rPr>
-              <a:t xml:space="preserve"/>
-            </a:r>
-            <a:endParaRPr lang="en-US" sz="1200"/>
-          </a:p>
-          <a:p>
-            <a:pPr marL="0" indent="0">
-              <a:lnSpc>
-                <a:spcPts val="1560"/>
-              </a:lnSpc>
-              <a:spcAft>
-                <a:spcPts val="0"/>
-              </a:spcAft>
-              <a:buNone/>
-            </a:pPr>
-            <a:r>
-              <a:rPr lang="en-US" sz="1200" b="0">
-                <a:solidFill>
-                  <a:srgbClr val="202b33"/>
-                </a:solidFill>
-                <a:latin typeface="Arial"/>
-                <a:ea typeface="Arial"/>
-                <a:cs typeface="Arial"/>
-              </a:rPr>
-              <a:t xml:space="preserve">A judge reads a thousand tokens and writes fifty. Run a council. Measure the disagreement.</a:t>
+              <a:t xml:space="preserve">Source slide 12. 21:30 to 26:00</a:t>
+            </a:r>
+            <a:endParaRPr lang="en-US" sz="1200"/>
+          </a:p>
+          <a:p>
+            <a:pPr marL="0" indent="0">
+              <a:lnSpc>
+                <a:spcPts val="1560"/>
+              </a:lnSpc>
+              <a:spcAft>
+                <a:spcPts val="0"/>
+              </a:spcAft>
+              <a:buNone/>
+            </a:pPr>
+            <a:r>
+              <a:rPr lang="en-US" sz="1200" b="0">
+                <a:solidFill>
+                  <a:srgbClr val="202b33"/>
+                </a:solidFill>
+                <a:latin typeface="Arial"/>
+                <a:ea typeface="Arial"/>
+                <a:cs typeface="Arial"/>
+              </a:rPr>
+              <a:t xml:space="preserve"/>
+            </a:r>
+            <a:endParaRPr lang="en-US" sz="1200"/>
+          </a:p>
+          <a:p>
+            <a:pPr marL="0" indent="0">
+              <a:lnSpc>
+                <a:spcPts val="1560"/>
+              </a:lnSpc>
+              <a:spcAft>
+                <a:spcPts val="0"/>
+              </a:spcAft>
+              <a:buNone/>
+            </a:pPr>
+            <a:r>
+              <a:rPr lang="en-US" sz="1200" b="0">
+                <a:solidFill>
+                  <a:srgbClr val="202b33"/>
+                </a:solidFill>
+                <a:latin typeface="Arial"/>
+                <a:ea typeface="Arial"/>
+                <a:cs typeface="Arial"/>
+              </a:rPr>
+              <a:t xml:space="preserve">Barrel of monkeys: lead with cheap parallel generation, on purpose</a:t>
+            </a:r>
+            <a:endParaRPr lang="en-US" sz="1200"/>
+          </a:p>
+          <a:p>
+            <a:pPr marL="0" indent="0">
+              <a:lnSpc>
+                <a:spcPts val="1560"/>
+              </a:lnSpc>
+              <a:spcAft>
+                <a:spcPts val="0"/>
+              </a:spcAft>
+              <a:buNone/>
+            </a:pPr>
+            <a:r>
+              <a:rPr lang="en-US" sz="1200" b="0">
+                <a:solidFill>
+                  <a:srgbClr val="202b33"/>
+                </a:solidFill>
+                <a:latin typeface="Arial"/>
+                <a:ea typeface="Arial"/>
+                <a:cs typeface="Arial"/>
+              </a:rPr>
+              <a:t xml:space="preserve"/>
+            </a:r>
+            <a:endParaRPr lang="en-US" sz="1200"/>
+          </a:p>
+          <a:p>
+            <a:pPr marL="0" indent="0">
+              <a:lnSpc>
+                <a:spcPts val="1560"/>
+              </a:lnSpc>
+              <a:spcAft>
+                <a:spcPts val="0"/>
+              </a:spcAft>
+              <a:buNone/>
+            </a:pPr>
+            <a:r>
+              <a:rPr lang="en-US" sz="1200" b="0">
+                <a:solidFill>
+                  <a:srgbClr val="202b33"/>
+                </a:solidFill>
+                <a:latin typeface="Arial"/>
+                <a:ea typeface="Arial"/>
+                <a:cs typeface="Arial"/>
+              </a:rPr>
+              <a:t xml:space="preserve">Council of guards: judges read a thousand tokens and write fifty; measure the disagreement</a:t>
             </a:r>
             <a:endParaRPr lang="en-US" sz="1200"/>
           </a:p>
@@ -954,6 +954,98 @@
                 <a:cs typeface="Arial"/>
               </a:rPr>
               <a:t xml:space="preserve">Here is what parallel attempts actually buy. Understanding of the models you depend on: run one brief through two of them and you learn what each reaches for and what each forgets. A migration harness: same brief, new model, diff the behavior before you switch, instead of after the incident. Better output: a synthesis of compatible ideas is often better than any single draft. And the cheap one, which is the one I care about: judging. A judge reads a thousand tokens and writes fifty. Output is what costs, so you can afford three or five judges from different models on every candidate, and the number you want back is not the average score. It is the disagreement. When the judges split or their reasons barely overlap, that candidate is sitting in territory nobody understands, and that is the one you do not ship on autopilot. I call this the Council of Guards. It picks between one and three alternatives to generate, and it costs a fraction of the generation it is guarding.</a:t>
+            </a:r>
+            <a:endParaRPr lang="en-US" sz="1200"/>
+          </a:p>
+          <a:p>
+            <a:pPr marL="0" indent="0">
+              <a:lnSpc>
+                <a:spcPts val="1560"/>
+              </a:lnSpc>
+              <a:spcAft>
+                <a:spcPts val="0"/>
+              </a:spcAft>
+              <a:buNone/>
+            </a:pPr>
+            <a:r>
+              <a:rPr lang="en-US" sz="1200" b="0">
+                <a:solidFill>
+                  <a:srgbClr val="202b33"/>
+                </a:solidFill>
+                <a:latin typeface="Arial"/>
+                <a:ea typeface="Arial"/>
+                <a:cs typeface="Arial"/>
+              </a:rPr>
+              <a:t xml:space="preserve"/>
+            </a:r>
+            <a:endParaRPr lang="en-US" sz="1200"/>
+          </a:p>
+          <a:p>
+            <a:pPr marL="0" indent="0">
+              <a:lnSpc>
+                <a:spcPts val="1560"/>
+              </a:lnSpc>
+              <a:spcAft>
+                <a:spcPts val="0"/>
+              </a:spcAft>
+              <a:buNone/>
+            </a:pPr>
+            <a:r>
+              <a:rPr lang="en-US" sz="1200" b="0">
+                <a:solidFill>
+                  <a:srgbClr val="202b33"/>
+                </a:solidFill>
+                <a:latin typeface="Arial"/>
+                <a:ea typeface="Arial"/>
+                <a:cs typeface="Arial"/>
+              </a:rPr>
+              <a:t xml:space="preserve">The generation side has a name too, and I am not sorry about it: the barrel-of-monkeys maneuver. Lead with parallel generation on purpose. You are adding a controlled section of chaos that the next stage has to handle: a revision loop, a router, the council, or your users in an A/B test. Why you would want the chaos varies. Sometimes you want the fastest answer, so you race. Sometimes you want the best parts of several, so a frontier model, whose input tokens are the cheap ones, reads all of them and writes one coherent output. Sometimes you just want more candidates for the judges to rank so the best whole answer goes downstream. In law or medicine, where the rules are extensive and specific, that is how you catch the one errant mistake that shows up in one output out of ten. And the monkeys can be cheap: models at a hundredth or a thousandth the price of the frontier, generating alternatives in a loop. Some of them need a tool-calling agent with files, search and git, which means a sandbox and somebody's cloud; others single-shot it fine. That is an architecture question about how much effort you want in a system that keeps improving versus one you can retune at runtime. Fan-out is a tool you encapsulate at points in the graph: default model most of the time, n alternatives for a sample of requests. Your needs and your opportunities decide why, where and how often.</a:t>
+            </a:r>
+            <a:endParaRPr lang="en-US" sz="1200"/>
+          </a:p>
+          <a:p>
+            <a:pPr marL="0" indent="0">
+              <a:lnSpc>
+                <a:spcPts val="1560"/>
+              </a:lnSpc>
+              <a:spcAft>
+                <a:spcPts val="0"/>
+              </a:spcAft>
+              <a:buNone/>
+            </a:pPr>
+            <a:r>
+              <a:rPr lang="en-US" sz="1200" b="0">
+                <a:solidFill>
+                  <a:srgbClr val="202b33"/>
+                </a:solidFill>
+                <a:latin typeface="Arial"/>
+                <a:ea typeface="Arial"/>
+                <a:cs typeface="Arial"/>
+              </a:rPr>
+              <a:t xml:space="preserve"/>
+            </a:r>
+            <a:endParaRPr lang="en-US" sz="1200"/>
+          </a:p>
+          <a:p>
+            <a:pPr marL="0" indent="0">
+              <a:lnSpc>
+                <a:spcPts val="1560"/>
+              </a:lnSpc>
+              <a:spcAft>
+                <a:spcPts val="0"/>
+              </a:spcAft>
+              <a:buNone/>
+            </a:pPr>
+            <a:r>
+              <a:rPr lang="en-US" sz="1200" b="0">
+                <a:solidFill>
+                  <a:srgbClr val="202b33"/>
+                </a:solidFill>
+                <a:latin typeface="Arial"/>
+                <a:ea typeface="Arial"/>
+                <a:cs typeface="Arial"/>
+              </a:rPr>
+              <a:t xml:space="preserve">Does this border on speculative optimization dressed up as learning? Yes, possibly. Probably sometimes. We will find out. So do not build any of it without env vars to turn it down, and ideally build the system that adjusts its own fan-out and token burn from what it measures. Right? Right. That system is the companion talk.</a:t>
             </a:r>
             <a:endParaRPr lang="en-US" sz="1200"/>
           </a:p>
@@ -1342,7 +1434,7 @@
                 <a:ea typeface="Arial"/>
                 <a:cs typeface="Arial"/>
               </a:rPr>
-              <a:t xml:space="preserve">Source slide 13. 25:30 to 27:30</a:t>
+              <a:t xml:space="preserve">Source slide 13. 26:00 to 27:30</a:t>
             </a:r>
             <a:endParaRPr lang="en-US" sz="1200"/>
           </a:p>
@@ -4801,7 +4893,7 @@
                 <a:ea typeface="Arial"/>
                 <a:cs typeface="Arial"/>
               </a:rPr>
-              <a:t xml:space="preserve">Source slide 8. 12:30 to 15:30</a:t>
+              <a:t xml:space="preserve">Source slide 8. 12:30 to 15:00</a:t>
             </a:r>
             <a:endParaRPr lang="en-US" sz="1200"/>
           </a:p>
@@ -5374,7 +5466,7 @@
                 <a:ea typeface="Arial"/>
                 <a:cs typeface="Arial"/>
               </a:rPr>
-              <a:t xml:space="preserve">Source slide 10. 15:30 to 18:00</a:t>
+              <a:t xml:space="preserve">Source slide 10. 15:00 to 17:30</a:t>
             </a:r>
             <a:endParaRPr lang="en-US" sz="1200"/>
           </a:p>
@@ -5855,7 +5947,7 @@
                 <a:ea typeface="Arial"/>
                 <a:cs typeface="Arial"/>
               </a:rPr>
-              <a:t xml:space="preserve">Source slide 11. 18:00 to 22:00</a:t>
+              <a:t xml:space="preserve">Source slide 11. 17:30 to 21:30</a:t>
             </a:r>
             <a:endParaRPr lang="en-US" sz="1200"/>
           </a:p>

--- a/artifacts/speaking-portfolio-expanded/decks/dynamic-scaling-30min-screen.pptx
+++ b/artifacts/speaking-portfolio-expanded/decks/dynamic-scaling-30min-screen.pptx
@@ -677,7 +677,7 @@
                 <a:ea typeface="Arial"/>
                 <a:cs typeface="Arial"/>
               </a:rPr>
-              <a:t xml:space="preserve">Source slide 12. 21:30 to 26:00</a:t>
+              <a:t xml:space="preserve">Source slide 12. 21:00 to 25:00</a:t>
             </a:r>
             <a:endParaRPr lang="en-US" sz="1200"/>
           </a:p>
@@ -769,7 +769,7 @@
                 <a:ea typeface="Arial"/>
                 <a:cs typeface="Arial"/>
               </a:rPr>
-              <a:t xml:space="preserve">Council of guards: judges read a thousand tokens and write fifty; measure the disagreement</a:t>
+              <a:t xml:space="preserve">Council of Guards: judges read a thousand tokens and write fifty; measure the disagreement</a:t>
             </a:r>
             <a:endParaRPr lang="en-US" sz="1200"/>
           </a:p>
@@ -861,283 +861,237 @@
                 <a:ea typeface="Arial"/>
                 <a:cs typeface="Arial"/>
               </a:rPr>
-              <a:t xml:space="preserve">Change the unit of work from images to whole designs. Give the batch-job problem to three generated agents with the same requirements and different priorities: a minimalist, a maintainer, a security and performance reviewer. Keep first drafts separate so they do not converge on the first plausible answer. The contrast is the product.</a:t>
-            </a:r>
-            <a:endParaRPr lang="en-US" sz="1200"/>
-          </a:p>
-          <a:p>
-            <a:pPr marL="0" indent="0">
-              <a:lnSpc>
-                <a:spcPts val="1560"/>
-              </a:lnSpc>
-              <a:spcAft>
-                <a:spcPts val="0"/>
-              </a:spcAft>
-              <a:buNone/>
-            </a:pPr>
-            <a:r>
-              <a:rPr lang="en-US" sz="1200" b="0">
-                <a:solidFill>
-                  <a:srgbClr val="202b33"/>
-                </a:solidFill>
-                <a:latin typeface="Arial"/>
-                <a:ea typeface="Arial"/>
-                <a:cs typeface="Arial"/>
-              </a:rPr>
-              <a:t xml:space="preserve"/>
-            </a:r>
-            <a:endParaRPr lang="en-US" sz="1200"/>
-          </a:p>
-          <a:p>
-            <a:pPr marL="0" indent="0">
-              <a:lnSpc>
-                <a:spcPts val="1560"/>
-              </a:lnSpc>
-              <a:spcAft>
-                <a:spcPts val="0"/>
-              </a:spcAft>
-              <a:buNone/>
-            </a:pPr>
-            <a:r>
-              <a:rPr lang="en-US" sz="1200" b="0">
-                <a:solidFill>
-                  <a:srgbClr val="202b33"/>
-                </a:solidFill>
-                <a:latin typeface="Arial"/>
-                <a:ea typeface="Arial"/>
-                <a:cs typeface="Arial"/>
-              </a:rPr>
-              <a:t xml:space="preserve">Somebody is going to cite Knight and Leveson at me, so let me do it first. 1986, twenty-seven teams, one specification, a million tests, and the independently written versions failed together far more than independence predicts. True, important, and about N-version programming as a correctness strategy. That is not what this is. I am not voting three models toward the truth, and I am not going to tell you the ensemble is right because it agreed with itself. If that is the pitch you heard, it is not mine.</a:t>
-            </a:r>
-            <a:endParaRPr lang="en-US" sz="1200"/>
-          </a:p>
-          <a:p>
-            <a:pPr marL="0" indent="0">
-              <a:lnSpc>
-                <a:spcPts val="1560"/>
-              </a:lnSpc>
-              <a:spcAft>
-                <a:spcPts val="0"/>
-              </a:spcAft>
-              <a:buNone/>
-            </a:pPr>
-            <a:r>
-              <a:rPr lang="en-US" sz="1200" b="0">
-                <a:solidFill>
-                  <a:srgbClr val="202b33"/>
-                </a:solidFill>
-                <a:latin typeface="Arial"/>
-                <a:ea typeface="Arial"/>
-                <a:cs typeface="Arial"/>
-              </a:rPr>
-              <a:t xml:space="preserve"/>
-            </a:r>
-            <a:endParaRPr lang="en-US" sz="1200"/>
-          </a:p>
-          <a:p>
-            <a:pPr marL="0" indent="0">
-              <a:lnSpc>
-                <a:spcPts val="1560"/>
-              </a:lnSpc>
-              <a:spcAft>
-                <a:spcPts val="0"/>
-              </a:spcAft>
-              <a:buNone/>
-            </a:pPr>
-            <a:r>
-              <a:rPr lang="en-US" sz="1200" b="0">
-                <a:solidFill>
-                  <a:srgbClr val="202b33"/>
-                </a:solidFill>
-                <a:latin typeface="Arial"/>
-                <a:ea typeface="Arial"/>
-                <a:cs typeface="Arial"/>
-              </a:rPr>
-              <a:t xml:space="preserve">Here is what parallel attempts actually buy. Understanding of the models you depend on: run one brief through two of them and you learn what each reaches for and what each forgets. A migration harness: same brief, new model, diff the behavior before you switch, instead of after the incident. Better output: a synthesis of compatible ideas is often better than any single draft. And the cheap one, which is the one I care about: judging. A judge reads a thousand tokens and writes fifty. Output is what costs, so you can afford three or five judges from different models on every candidate, and the number you want back is not the average score. It is the disagreement. When the judges split or their reasons barely overlap, that candidate is sitting in territory nobody understands, and that is the one you do not ship on autopilot. I call this the Council of Guards. It picks between one and three alternatives to generate, and it costs a fraction of the generation it is guarding.</a:t>
-            </a:r>
-            <a:endParaRPr lang="en-US" sz="1200"/>
-          </a:p>
-          <a:p>
-            <a:pPr marL="0" indent="0">
-              <a:lnSpc>
-                <a:spcPts val="1560"/>
-              </a:lnSpc>
-              <a:spcAft>
-                <a:spcPts val="0"/>
-              </a:spcAft>
-              <a:buNone/>
-            </a:pPr>
-            <a:r>
-              <a:rPr lang="en-US" sz="1200" b="0">
-                <a:solidFill>
-                  <a:srgbClr val="202b33"/>
-                </a:solidFill>
-                <a:latin typeface="Arial"/>
-                <a:ea typeface="Arial"/>
-                <a:cs typeface="Arial"/>
-              </a:rPr>
-              <a:t xml:space="preserve"/>
-            </a:r>
-            <a:endParaRPr lang="en-US" sz="1200"/>
-          </a:p>
-          <a:p>
-            <a:pPr marL="0" indent="0">
-              <a:lnSpc>
-                <a:spcPts val="1560"/>
-              </a:lnSpc>
-              <a:spcAft>
-                <a:spcPts val="0"/>
-              </a:spcAft>
-              <a:buNone/>
-            </a:pPr>
-            <a:r>
-              <a:rPr lang="en-US" sz="1200" b="0">
-                <a:solidFill>
-                  <a:srgbClr val="202b33"/>
-                </a:solidFill>
-                <a:latin typeface="Arial"/>
-                <a:ea typeface="Arial"/>
-                <a:cs typeface="Arial"/>
-              </a:rPr>
-              <a:t xml:space="preserve">The generation side has a name too, and I am not sorry about it: the barrel-of-monkeys maneuver. Lead with parallel generation on purpose. You are adding a controlled section of chaos that the next stage has to handle: a revision loop, a router, the council, or your users in an A/B test. Why you would want the chaos varies. Sometimes you want the fastest answer, so you race. Sometimes you want the best parts of several, so a frontier model, whose input tokens are the cheap ones, reads all of them and writes one coherent output. Sometimes you just want more candidates for the judges to rank so the best whole answer goes downstream. In law or medicine, where the rules are extensive and specific, that is how you catch the one errant mistake that shows up in one output out of ten. And the monkeys can be cheap: models at a hundredth or a thousandth the price of the frontier, generating alternatives in a loop. Some of them need a tool-calling agent with files, search and git, which means a sandbox and somebody's cloud; others single-shot it fine. That is an architecture question about how much effort you want in a system that keeps improving versus one you can retune at runtime. Fan-out is a tool you encapsulate at points in the graph: default model most of the time, n alternatives for a sample of requests. Your needs and your opportunities decide why, where and how often.</a:t>
-            </a:r>
-            <a:endParaRPr lang="en-US" sz="1200"/>
-          </a:p>
-          <a:p>
-            <a:pPr marL="0" indent="0">
-              <a:lnSpc>
-                <a:spcPts val="1560"/>
-              </a:lnSpc>
-              <a:spcAft>
-                <a:spcPts val="0"/>
-              </a:spcAft>
-              <a:buNone/>
-            </a:pPr>
-            <a:r>
-              <a:rPr lang="en-US" sz="1200" b="0">
-                <a:solidFill>
-                  <a:srgbClr val="202b33"/>
-                </a:solidFill>
-                <a:latin typeface="Arial"/>
-                <a:ea typeface="Arial"/>
-                <a:cs typeface="Arial"/>
-              </a:rPr>
-              <a:t xml:space="preserve"/>
-            </a:r>
-            <a:endParaRPr lang="en-US" sz="1200"/>
-          </a:p>
-          <a:p>
-            <a:pPr marL="0" indent="0">
-              <a:lnSpc>
-                <a:spcPts val="1560"/>
-              </a:lnSpc>
-              <a:spcAft>
-                <a:spcPts val="0"/>
-              </a:spcAft>
-              <a:buNone/>
-            </a:pPr>
-            <a:r>
-              <a:rPr lang="en-US" sz="1200" b="0">
-                <a:solidFill>
-                  <a:srgbClr val="202b33"/>
-                </a:solidFill>
-                <a:latin typeface="Arial"/>
-                <a:ea typeface="Arial"/>
-                <a:cs typeface="Arial"/>
-              </a:rPr>
-              <a:t xml:space="preserve">Does this border on speculative optimization dressed up as learning? Yes, possibly. Probably sometimes. We will find out. So do not build any of it without env vars to turn it down, and ideally build the system that adjusts its own fan-out and token burn from what it measures. Right? Right. That system is the companion talk.</a:t>
-            </a:r>
-            <a:endParaRPr lang="en-US" sz="1200"/>
-          </a:p>
-          <a:p>
-            <a:pPr marL="0" indent="0">
-              <a:lnSpc>
-                <a:spcPts val="1560"/>
-              </a:lnSpc>
-              <a:spcAft>
-                <a:spcPts val="0"/>
-              </a:spcAft>
-              <a:buNone/>
-            </a:pPr>
-            <a:r>
-              <a:rPr lang="en-US" sz="1200" b="0">
-                <a:solidFill>
-                  <a:srgbClr val="202b33"/>
-                </a:solidFill>
-                <a:latin typeface="Arial"/>
-                <a:ea typeface="Arial"/>
-                <a:cs typeface="Arial"/>
-              </a:rPr>
-              <a:t xml:space="preserve"/>
-            </a:r>
-            <a:endParaRPr lang="en-US" sz="1200"/>
-          </a:p>
-          <a:p>
-            <a:pPr marL="0" indent="0">
-              <a:lnSpc>
-                <a:spcPts val="1560"/>
-              </a:lnSpc>
-              <a:spcAft>
-                <a:spcPts val="0"/>
-              </a:spcAft>
-              <a:buNone/>
-            </a:pPr>
-            <a:r>
-              <a:rPr lang="en-US" sz="1200" b="0">
-                <a:solidFill>
-                  <a:srgbClr val="202b33"/>
-                </a:solidFill>
-                <a:latin typeface="Arial"/>
-                <a:ea typeface="Arial"/>
-                <a:cs typeface="Arial"/>
-              </a:rPr>
-              <a:t xml:space="preserve">Write the gates before reading the candidates: no duplicate dispatch after restart, no cross-tenant spend, no regeneration on notification retry, no dispatch after deadline. Run executable checks first. In the exercise every candidate fails a gate, including the careful one, which is the point: the council is allowed to reject the room. Then combine compatible ideas into a new candidate with one coherent set of assumptions and run the gates again. Passing parts do not make a passing whole. Stop at the review budget; an endless debate is an expensive way to not ship.</a:t>
-            </a:r>
-            <a:endParaRPr lang="en-US" sz="1200"/>
-          </a:p>
-          <a:p>
-            <a:pPr marL="0" indent="0">
-              <a:lnSpc>
-                <a:spcPts val="1560"/>
-              </a:lnSpc>
-              <a:spcAft>
-                <a:spcPts val="0"/>
-              </a:spcAft>
-              <a:buNone/>
-            </a:pPr>
-            <a:r>
-              <a:rPr lang="en-US" sz="1200" b="0">
-                <a:solidFill>
-                  <a:srgbClr val="202b33"/>
-                </a:solidFill>
-                <a:latin typeface="Arial"/>
-                <a:ea typeface="Arial"/>
-                <a:cs typeface="Arial"/>
-              </a:rPr>
-              <a:t xml:space="preserve"/>
-            </a:r>
-            <a:endParaRPr lang="en-US" sz="1200"/>
-          </a:p>
-          <a:p>
-            <a:pPr marL="0" indent="0">
-              <a:lnSpc>
-                <a:spcPts val="1560"/>
-              </a:lnSpc>
-              <a:spcAft>
-                <a:spcPts val="0"/>
-              </a:spcAft>
-              <a:buNone/>
-            </a:pPr>
-            <a:r>
-              <a:rPr lang="en-US" sz="1200" b="0">
-                <a:solidFill>
-                  <a:srgbClr val="202b33"/>
-                </a:solidFill>
-                <a:latin typeface="Arial"/>
-                <a:ea typeface="Arial"/>
-                <a:cs typeface="Arial"/>
-              </a:rPr>
-              <a:t xml:space="preserve">None of this looks like the engineering we were raised on. Do not do the work twice. Do not spend compute speculatively. One right answer per ticket. Those were axioms when the expensive thing was the engineer. When the expensive thing is being wrong, and a second draft costs cents, doing it three times and reading what disagrees is the frugal move. I am not a shill for Big Token. I am telling you that cheaper, safer and faster now sometimes come from spending exactly where yesterday's wisdom told you not to.</a:t>
+              <a:t xml:space="preserve">Change the unit of work from images to whole designs. One brief, three generated agents: minimalist, maintainer, security and performance reviewer. Separate first drafts. The contrast is the product.</a:t>
+            </a:r>
+            <a:endParaRPr lang="en-US" sz="1200"/>
+          </a:p>
+          <a:p>
+            <a:pPr marL="0" indent="0">
+              <a:lnSpc>
+                <a:spcPts val="1560"/>
+              </a:lnSpc>
+              <a:spcAft>
+                <a:spcPts val="0"/>
+              </a:spcAft>
+              <a:buNone/>
+            </a:pPr>
+            <a:r>
+              <a:rPr lang="en-US" sz="1200" b="0">
+                <a:solidFill>
+                  <a:srgbClr val="202b33"/>
+                </a:solidFill>
+                <a:latin typeface="Arial"/>
+                <a:ea typeface="Arial"/>
+                <a:cs typeface="Arial"/>
+              </a:rPr>
+              <a:t xml:space="preserve"/>
+            </a:r>
+            <a:endParaRPr lang="en-US" sz="1200"/>
+          </a:p>
+          <a:p>
+            <a:pPr marL="0" indent="0">
+              <a:lnSpc>
+                <a:spcPts val="1560"/>
+              </a:lnSpc>
+              <a:spcAft>
+                <a:spcPts val="0"/>
+              </a:spcAft>
+              <a:buNone/>
+            </a:pPr>
+            <a:r>
+              <a:rPr lang="en-US" sz="1200" b="0">
+                <a:solidFill>
+                  <a:srgbClr val="202b33"/>
+                </a:solidFill>
+                <a:latin typeface="Arial"/>
+                <a:ea typeface="Arial"/>
+                <a:cs typeface="Arial"/>
+              </a:rPr>
+              <a:t xml:space="preserve">Somebody is going to cite Knight and Leveson at me, so let me do it first. 1986, twenty-seven programmers, one specification, a million tests, and the independently written versions failed together far more than independence predicts. True, important, and about N-version programming as a correctness strategy. Not this. I am not voting three models toward the truth.</a:t>
+            </a:r>
+            <a:endParaRPr lang="en-US" sz="1200"/>
+          </a:p>
+          <a:p>
+            <a:pPr marL="0" indent="0">
+              <a:lnSpc>
+                <a:spcPts val="1560"/>
+              </a:lnSpc>
+              <a:spcAft>
+                <a:spcPts val="0"/>
+              </a:spcAft>
+              <a:buNone/>
+            </a:pPr>
+            <a:r>
+              <a:rPr lang="en-US" sz="1200" b="0">
+                <a:solidFill>
+                  <a:srgbClr val="202b33"/>
+                </a:solidFill>
+                <a:latin typeface="Arial"/>
+                <a:ea typeface="Arial"/>
+                <a:cs typeface="Arial"/>
+              </a:rPr>
+              <a:t xml:space="preserve"/>
+            </a:r>
+            <a:endParaRPr lang="en-US" sz="1200"/>
+          </a:p>
+          <a:p>
+            <a:pPr marL="0" indent="0">
+              <a:lnSpc>
+                <a:spcPts val="1560"/>
+              </a:lnSpc>
+              <a:spcAft>
+                <a:spcPts val="0"/>
+              </a:spcAft>
+              <a:buNone/>
+            </a:pPr>
+            <a:r>
+              <a:rPr lang="en-US" sz="1200" b="0">
+                <a:solidFill>
+                  <a:srgbClr val="202b33"/>
+                </a:solidFill>
+                <a:latin typeface="Arial"/>
+                <a:ea typeface="Arial"/>
+                <a:cs typeface="Arial"/>
+              </a:rPr>
+              <a:t xml:space="preserve">The generation side has a name I am not sorry about: the barrel-of-monkeys maneuver. Lead with cheap parallel generation on purpose — monkeys at a hundredth of the frontier's price — and hand the barrel to the next stage. Four reasons. Race: take the first draft that passes the gate. Synthesize: a frontier model reads them all, input tokens being the cheap ones, and writes one coherent output. Rank: more candidates for the judges, so the best whole answer goes downstream. Catch: in law or medicine, where the rules are extensive and specific, the mistake you fear shows up in one output out of ten, and the only way to see it is to have ten.</a:t>
+            </a:r>
+            <a:endParaRPr lang="en-US" sz="1200"/>
+          </a:p>
+          <a:p>
+            <a:pPr marL="0" indent="0">
+              <a:lnSpc>
+                <a:spcPts val="1560"/>
+              </a:lnSpc>
+              <a:spcAft>
+                <a:spcPts val="0"/>
+              </a:spcAft>
+              <a:buNone/>
+            </a:pPr>
+            <a:r>
+              <a:rPr lang="en-US" sz="1200" b="0">
+                <a:solidFill>
+                  <a:srgbClr val="202b33"/>
+                </a:solidFill>
+                <a:latin typeface="Arial"/>
+                <a:ea typeface="Arial"/>
+                <a:cs typeface="Arial"/>
+              </a:rPr>
+              <a:t xml:space="preserve"/>
+            </a:r>
+            <a:endParaRPr lang="en-US" sz="1200"/>
+          </a:p>
+          <a:p>
+            <a:pPr marL="0" indent="0">
+              <a:lnSpc>
+                <a:spcPts val="1560"/>
+              </a:lnSpc>
+              <a:spcAft>
+                <a:spcPts val="0"/>
+              </a:spcAft>
+              <a:buNone/>
+            </a:pPr>
+            <a:r>
+              <a:rPr lang="en-US" sz="1200" b="0">
+                <a:solidFill>
+                  <a:srgbClr val="202b33"/>
+                </a:solidFill>
+                <a:latin typeface="Arial"/>
+                <a:ea typeface="Arial"/>
+                <a:cs typeface="Arial"/>
+              </a:rPr>
+              <a:t xml:space="preserve">The cheap half is judging. A judge reads a thousand tokens and writes fifty, and output is what costs, so five judges from different models on every candidate is affordable. Not the average score. The disagreement. Judges that split, or whose reasons barely overlap, have found territory nobody understands; that candidate does not ship on autopilot. I call this the Council of Guards: it reads everything, writes almost nothing, and costs a fraction of what it guards.</a:t>
+            </a:r>
+            <a:endParaRPr lang="en-US" sz="1200"/>
+          </a:p>
+          <a:p>
+            <a:pPr marL="0" indent="0">
+              <a:lnSpc>
+                <a:spcPts val="1560"/>
+              </a:lnSpc>
+              <a:spcAft>
+                <a:spcPts val="0"/>
+              </a:spcAft>
+              <a:buNone/>
+            </a:pPr>
+            <a:r>
+              <a:rPr lang="en-US" sz="1200" b="0">
+                <a:solidFill>
+                  <a:srgbClr val="202b33"/>
+                </a:solidFill>
+                <a:latin typeface="Arial"/>
+                <a:ea typeface="Arial"/>
+                <a:cs typeface="Arial"/>
+              </a:rPr>
+              <a:t xml:space="preserve"/>
+            </a:r>
+            <a:endParaRPr lang="en-US" sz="1200"/>
+          </a:p>
+          <a:p>
+            <a:pPr marL="0" indent="0">
+              <a:lnSpc>
+                <a:spcPts val="1560"/>
+              </a:lnSpc>
+              <a:spcAft>
+                <a:spcPts val="0"/>
+              </a:spcAft>
+              <a:buNone/>
+            </a:pPr>
+            <a:r>
+              <a:rPr lang="en-US" sz="1200" b="0">
+                <a:solidFill>
+                  <a:srgbClr val="202b33"/>
+                </a:solidFill>
+                <a:latin typeface="Arial"/>
+                <a:ea typeface="Arial"/>
+                <a:cs typeface="Arial"/>
+              </a:rPr>
+              <a:t xml:space="preserve">Write the gates before you read the candidates: no duplicate dispatch after restart, no cross-tenant spend, no regeneration on notification retry, no dispatch after deadline. Every candidate fails one, including the careful one; the council is allowed to reject the room. A synthesis is a new candidate. Stop at the review budget.</a:t>
+            </a:r>
+            <a:endParaRPr lang="en-US" sz="1200"/>
+          </a:p>
+          <a:p>
+            <a:pPr marL="0" indent="0">
+              <a:lnSpc>
+                <a:spcPts val="1560"/>
+              </a:lnSpc>
+              <a:spcAft>
+                <a:spcPts val="0"/>
+              </a:spcAft>
+              <a:buNone/>
+            </a:pPr>
+            <a:r>
+              <a:rPr lang="en-US" sz="1200" b="0">
+                <a:solidFill>
+                  <a:srgbClr val="202b33"/>
+                </a:solidFill>
+                <a:latin typeface="Arial"/>
+                <a:ea typeface="Arial"/>
+                <a:cs typeface="Arial"/>
+              </a:rPr>
+              <a:t xml:space="preserve"/>
+            </a:r>
+            <a:endParaRPr lang="en-US" sz="1200"/>
+          </a:p>
+          <a:p>
+            <a:pPr marL="0" indent="0">
+              <a:lnSpc>
+                <a:spcPts val="1560"/>
+              </a:lnSpc>
+              <a:spcAft>
+                <a:spcPts val="0"/>
+              </a:spcAft>
+              <a:buNone/>
+            </a:pPr>
+            <a:r>
+              <a:rPr lang="en-US" sz="1200" b="0">
+                <a:solidFill>
+                  <a:srgbClr val="202b33"/>
+                </a:solidFill>
+                <a:latin typeface="Arial"/>
+                <a:ea typeface="Arial"/>
+                <a:cs typeface="Arial"/>
+              </a:rPr>
+              <a:t xml:space="preserve">None of this looks like the engineering we were raised on. Do not do the work twice. Do not spend compute speculatively. One right answer per ticket. Those were axioms when the expensive thing was the engineer. When the expensive thing is being wrong and a second draft costs cents, doing it three times and reading what disagrees is the frugal move. I am not a shill for Big Token. Cheaper, safer and faster now sometimes come from spending exactly where yesterday's wisdom told you not to.</a:t>
             </a:r>
             <a:endParaRPr lang="en-US" sz="1200"/>
           </a:p>
@@ -1434,7 +1388,7 @@
                 <a:ea typeface="Arial"/>
                 <a:cs typeface="Arial"/>
               </a:rPr>
-              <a:t xml:space="preserve">Source slide 13. 26:00 to 27:30</a:t>
+              <a:t xml:space="preserve">Source slide 13. 25:00 to 27:30</a:t>
             </a:r>
             <a:endParaRPr lang="en-US" sz="1200"/>
           </a:p>
@@ -2672,53 +2626,53 @@
                 <a:ea typeface="Arial"/>
                 <a:cs typeface="Arial"/>
               </a:rPr>
-              <a:t xml:space="preserve">For twenty years scaling was an infra question answered once for everyone. Add replicas or buy a bigger box, then let an autoscaler watch CPU and guess. The workload never got a vote.</a:t>
-            </a:r>
-            <a:endParaRPr lang="en-US" sz="1200"/>
-          </a:p>
-          <a:p>
-            <a:pPr marL="0" indent="0">
-              <a:lnSpc>
-                <a:spcPts val="1560"/>
-              </a:lnSpc>
-              <a:spcAft>
-                <a:spcPts val="0"/>
-              </a:spcAft>
-              <a:buNone/>
-            </a:pPr>
-            <a:r>
-              <a:rPr lang="en-US" sz="1200" b="0">
-                <a:solidFill>
-                  <a:srgbClr val="202b33"/>
-                </a:solidFill>
-                <a:latin typeface="Arial"/>
-                <a:ea typeface="Arial"/>
-                <a:cs typeface="Arial"/>
-              </a:rPr>
-              <a:t xml:space="preserve"/>
-            </a:r>
-            <a:endParaRPr lang="en-US" sz="1200"/>
-          </a:p>
-          <a:p>
-            <a:pPr marL="0" indent="0">
-              <a:lnSpc>
-                <a:spcPts val="1560"/>
-              </a:lnSpc>
-              <a:spcAft>
-                <a:spcPts val="0"/>
-              </a:spcAft>
-              <a:buNone/>
-            </a:pPr>
-            <a:r>
-              <a:rPr lang="en-US" sz="1200" b="0">
-                <a:solidFill>
-                  <a:srgbClr val="202b33"/>
-                </a:solidFill>
-                <a:latin typeface="Arial"/>
-                <a:ea typeface="Arial"/>
-                <a:cs typeface="Arial"/>
-              </a:rPr>
-              <a:t xml:space="preserve">Agentic workloads can vote. The orchestrator knows this batch is mostly waiting on a provider, that this one needs a GPU for ninety seconds, that this one is untrusted code and wants a sandbox. It can say so, per job, at the moment the job starts.</a:t>
+              <a:t xml:space="preserve">For twenty years scaling was an infra question answered once for everyone. Add replicas or buy a bigger box, then let an autoscaler watch CPU and guess. The workload never got a say.</a:t>
+            </a:r>
+            <a:endParaRPr lang="en-US" sz="1200"/>
+          </a:p>
+          <a:p>
+            <a:pPr marL="0" indent="0">
+              <a:lnSpc>
+                <a:spcPts val="1560"/>
+              </a:lnSpc>
+              <a:spcAft>
+                <a:spcPts val="0"/>
+              </a:spcAft>
+              <a:buNone/>
+            </a:pPr>
+            <a:r>
+              <a:rPr lang="en-US" sz="1200" b="0">
+                <a:solidFill>
+                  <a:srgbClr val="202b33"/>
+                </a:solidFill>
+                <a:latin typeface="Arial"/>
+                <a:ea typeface="Arial"/>
+                <a:cs typeface="Arial"/>
+              </a:rPr>
+              <a:t xml:space="preserve"/>
+            </a:r>
+            <a:endParaRPr lang="en-US" sz="1200"/>
+          </a:p>
+          <a:p>
+            <a:pPr marL="0" indent="0">
+              <a:lnSpc>
+                <a:spcPts val="1560"/>
+              </a:lnSpc>
+              <a:spcAft>
+                <a:spcPts val="0"/>
+              </a:spcAft>
+              <a:buNone/>
+            </a:pPr>
+            <a:r>
+              <a:rPr lang="en-US" sz="1200" b="0">
+                <a:solidFill>
+                  <a:srgbClr val="202b33"/>
+                </a:solidFill>
+                <a:latin typeface="Arial"/>
+                <a:ea typeface="Arial"/>
+                <a:cs typeface="Arial"/>
+              </a:rPr>
+              <a:t xml:space="preserve">Agentic workloads do. The orchestrator knows this batch is mostly waiting on a provider, that this one needs a GPU for ninety seconds, that this one is untrusted code and wants a sandbox. It can say so, per job, at the moment the job starts.</a:t>
             </a:r>
             <a:endParaRPr lang="en-US" sz="1200"/>
           </a:p>
@@ -5123,7 +5077,7 @@
                 <a:ea typeface="Arial"/>
                 <a:cs typeface="Arial"/>
               </a:rPr>
-              <a:t xml:space="preserve">The pieces exist, and they are shaped for this. Fly.io Sprites are hardware-isolated VMs that create in a second or two, checkpoint and restore, and take an egress policy from outside so the agent inside cannot loosen it. Depot sandboxes bill per second for exactly this: run agent-generated code, stream output, throw it away.</a:t>
+              <a:t xml:space="preserve">The pieces exist, and they are shaped for this. Fly.io Sprites are microVMs whose stated creation target is under a second, checkpoint and restore, and take an egress policy from outside so the agent inside cannot loosen it. Depot sandboxes bill by the second for exactly this: run agent-generated code, throw it away.</a:t>
             </a:r>
             <a:endParaRPr lang="en-US" sz="1200"/>
           </a:p>
@@ -5512,7 +5466,7 @@
                 <a:ea typeface="Arial"/>
                 <a:cs typeface="Arial"/>
               </a:rPr>
-              <a:t xml:space="preserve">accepted → submitted → waiting → completed / failed / unresolved</a:t>
+              <a:t xml:space="preserve">queued → submitted → waiting → completed / failed / unresolved</a:t>
             </a:r>
             <a:endParaRPr lang="en-US" sz="1200"/>
           </a:p>
@@ -5947,7 +5901,7 @@
                 <a:ea typeface="Arial"/>
                 <a:cs typeface="Arial"/>
               </a:rPr>
-              <a:t xml:space="preserve">Source slide 11. 17:30 to 21:30</a:t>
+              <a:t xml:space="preserve">Source slide 11. 17:30 to 21:00</a:t>
             </a:r>
             <a:endParaRPr lang="en-US" sz="1200"/>
           </a:p>
@@ -6315,7 +6269,7 @@
                 <a:ea typeface="Arial"/>
                 <a:cs typeface="Arial"/>
               </a:rPr>
-              <a:t xml:space="preserve">Five minutes from demo.md. Ask the room for each next transition before revealing it.</a:t>
+              <a:t xml:space="preserve">The trace in demo.md; compress rows 1 and 2 on the short routes. Ask the room for each next transition before revealing it.</a:t>
             </a:r>
             <a:endParaRPr lang="en-US" sz="1200"/>
           </a:p>
@@ -6832,7 +6786,7 @@
                 <a:ea typeface="Arial"/>
                 <a:cs typeface="Arial"/>
               </a:rPr>
-              <a:t xml:space="preserve">Attempts are a scaling axis. So is judging.</a:t>
+              <a:t xml:space="preserve">Monkeys, Then Guards</a:t>
             </a:r>
             <a:endParaRPr lang="en-US" sz="3900"/>
           </a:p>
@@ -6862,7 +6816,7 @@
       </p:sp>
       <p:pic>
         <p:nvPicPr>
-          <p:cNvPr id="5" name="b4949abe8dedb577fd5f9a3e1c7aa70046fe06211202f0b36f95e7c744c651ce" descr="Different priorities expose tradeoffs. Common requirements and checks apply to every candidate."/>
+          <p:cNvPr id="5" name="2c5fb820b277964d777498358b0962f4a0f45afc5a39c350b143fa7e45e40586" descr="Different priorities expose tradeoffs. Common requirements and checks apply to every candidate."/>
           <p:cNvPicPr>
             <a:picLocks noChangeAspect="1"/>
           </p:cNvPicPr>
@@ -9090,7 +9044,7 @@
       </p:sp>
       <p:pic>
         <p:nvPicPr>
-          <p:cNvPr id="5" name="8fde8ed4544054c6ba696fe2945ded1fdf0c0b247ec34f09fb00f8685dfce56b" descr="Illustrative $2 run cap: settled + reserved ≤ $2. Prices here are invented fixture values."/>
+          <p:cNvPr id="5" name="53c399b4989d541a9290cbf8888665cf190abef617844fd5194169975728c017" descr="Illustrative $2 run cap: settled + reserved ≤ $2. Prices here are invented fixture values."/>
           <p:cNvPicPr>
             <a:picLocks noChangeAspect="1"/>
           </p:cNvPicPr>
@@ -9344,7 +9298,7 @@
                 <a:ea typeface="Arial"/>
                 <a:cs typeface="Arial"/>
               </a:rPr>
-              <a:t xml:space="preserve">The inversion: infra as an agent capability</a:t>
+              <a:t xml:space="preserve">Infra Is a Tool Call</a:t>
             </a:r>
             <a:endParaRPr lang="en-US" sz="3900"/>
           </a:p>
@@ -9628,7 +9582,7 @@
                 <a:ea typeface="Arial"/>
                 <a:cs typeface="Arial"/>
               </a:rPr>
-              <a:t xml:space="preserve">The ecosystem is already ephemeral by default</a:t>
+              <a:t xml:space="preserve">Torn Down by Default</a:t>
             </a:r>
             <a:endParaRPr lang="en-US" sz="3900"/>
           </a:p>
@@ -9658,7 +9612,7 @@
       </p:sp>
       <p:pic>
         <p:nvPicPr>
-          <p:cNvPr id="5" name="f5c9434104cce2c1d2b93f00f44fc408290defaf280712183703c30a3c4a91dd" descr="Sandboxes, serverless GPUs, durable edge state and spot capacity, all created in seconds and torn down by default."/>
+          <p:cNvPr id="5" name="1daa0143328d8028c247af2b7cfb4a0a77c5d39818a1b12c28efc7e58b692783" descr="Sandboxes, serverless GPUs, durable edge state and spot capacity, all created in seconds and torn down by default."/>
           <p:cNvPicPr>
             <a:picLocks noChangeAspect="1"/>
           </p:cNvPicPr>

--- a/artifacts/speaking-portfolio-expanded/decks/dynamic-scaling-30min-screen.pptx
+++ b/artifacts/speaking-portfolio-expanded/decks/dynamic-scaling-30min-screen.pptx
@@ -677,7 +677,7 @@
                 <a:ea typeface="Arial"/>
                 <a:cs typeface="Arial"/>
               </a:rPr>
-              <a:t xml:space="preserve">Source slide 12. 21:00 to 25:00</a:t>
+              <a:t xml:space="preserve">Source slide 12. 20:00 to 25:00</a:t>
             </a:r>
             <a:endParaRPr lang="en-US" sz="1200"/>
           </a:p>
@@ -861,52 +861,6 @@
                 <a:ea typeface="Arial"/>
                 <a:cs typeface="Arial"/>
               </a:rPr>
-              <a:t xml:space="preserve">Change the unit of work from images to whole designs. One brief, three generated agents: minimalist, maintainer, security and performance reviewer. Separate first drafts. The contrast is the product.</a:t>
-            </a:r>
-            <a:endParaRPr lang="en-US" sz="1200"/>
-          </a:p>
-          <a:p>
-            <a:pPr marL="0" indent="0">
-              <a:lnSpc>
-                <a:spcPts val="1560"/>
-              </a:lnSpc>
-              <a:spcAft>
-                <a:spcPts val="0"/>
-              </a:spcAft>
-              <a:buNone/>
-            </a:pPr>
-            <a:r>
-              <a:rPr lang="en-US" sz="1200" b="0">
-                <a:solidFill>
-                  <a:srgbClr val="202b33"/>
-                </a:solidFill>
-                <a:latin typeface="Arial"/>
-                <a:ea typeface="Arial"/>
-                <a:cs typeface="Arial"/>
-              </a:rPr>
-              <a:t xml:space="preserve"/>
-            </a:r>
-            <a:endParaRPr lang="en-US" sz="1200"/>
-          </a:p>
-          <a:p>
-            <a:pPr marL="0" indent="0">
-              <a:lnSpc>
-                <a:spcPts val="1560"/>
-              </a:lnSpc>
-              <a:spcAft>
-                <a:spcPts val="0"/>
-              </a:spcAft>
-              <a:buNone/>
-            </a:pPr>
-            <a:r>
-              <a:rPr lang="en-US" sz="1200" b="0">
-                <a:solidFill>
-                  <a:srgbClr val="202b33"/>
-                </a:solidFill>
-                <a:latin typeface="Arial"/>
-                <a:ea typeface="Arial"/>
-                <a:cs typeface="Arial"/>
-              </a:rPr>
               <a:t xml:space="preserve">Somebody is going to cite Knight and Leveson at me, so let me do it first. 1986, twenty-seven programmers, one specification, a million tests, and the independently written versions failed together far more than independence predicts. True, important, and about N-version programming as a correctness strategy. Not this. I am not voting three models toward the truth.</a:t>
             </a:r>
             <a:endParaRPr lang="en-US" sz="1200"/>
@@ -954,6 +908,52 @@
                 <a:cs typeface="Arial"/>
               </a:rPr>
               <a:t xml:space="preserve">The generation side has a name I am not sorry about: the barrel-of-monkeys maneuver. Lead with cheap parallel generation on purpose — monkeys at a hundredth of the frontier's price — and hand the barrel to the next stage. Four reasons. Race: take the first draft that passes the gate. Synthesize: a frontier model reads them all, input tokens being the cheap ones, and writes one coherent output. Rank: more candidates for the judges, so the best whole answer goes downstream. Catch: in law or medicine, where the rules are extensive and specific, the mistake you fear shows up in one output out of ten, and the only way to see it is to have ten.</a:t>
+            </a:r>
+            <a:endParaRPr lang="en-US" sz="1200"/>
+          </a:p>
+          <a:p>
+            <a:pPr marL="0" indent="0">
+              <a:lnSpc>
+                <a:spcPts val="1560"/>
+              </a:lnSpc>
+              <a:spcAft>
+                <a:spcPts val="0"/>
+              </a:spcAft>
+              <a:buNone/>
+            </a:pPr>
+            <a:r>
+              <a:rPr lang="en-US" sz="1200" b="0">
+                <a:solidFill>
+                  <a:srgbClr val="202b33"/>
+                </a:solidFill>
+                <a:latin typeface="Arial"/>
+                <a:ea typeface="Arial"/>
+                <a:cs typeface="Arial"/>
+              </a:rPr>
+              <a:t xml:space="preserve"/>
+            </a:r>
+            <a:endParaRPr lang="en-US" sz="1200"/>
+          </a:p>
+          <a:p>
+            <a:pPr marL="0" indent="0">
+              <a:lnSpc>
+                <a:spcPts val="1560"/>
+              </a:lnSpc>
+              <a:spcAft>
+                <a:spcPts val="0"/>
+              </a:spcAft>
+              <a:buNone/>
+            </a:pPr>
+            <a:r>
+              <a:rPr lang="en-US" sz="1200" b="0">
+                <a:solidFill>
+                  <a:srgbClr val="202b33"/>
+                </a:solidFill>
+                <a:latin typeface="Arial"/>
+                <a:ea typeface="Arial"/>
+                <a:cs typeface="Arial"/>
+              </a:rPr>
+              <a:t xml:space="preserve">Speculative optimization in a lab coat? Possibly. Ship it with an env var that sets fan-out to one, and ideally let the system tune that knob itself. Right? Right. That is the companion talk.</a:t>
             </a:r>
             <a:endParaRPr lang="en-US" sz="1200"/>
           </a:p>
@@ -4320,7 +4320,7 @@
                 <a:ea typeface="Arial"/>
                 <a:cs typeface="Arial"/>
               </a:rPr>
-              <a:t xml:space="preserve">Source slide 7. 09:30 to 12:30</a:t>
+              <a:t xml:space="preserve">Source slide 7. 09:30 to 12:00</a:t>
             </a:r>
             <a:endParaRPr lang="en-US" sz="1200"/>
           </a:p>
@@ -4847,7 +4847,7 @@
                 <a:ea typeface="Arial"/>
                 <a:cs typeface="Arial"/>
               </a:rPr>
-              <a:t xml:space="preserve">Source slide 8. 12:30 to 15:00</a:t>
+              <a:t xml:space="preserve">Source slide 8. 12:00 to 14:30</a:t>
             </a:r>
             <a:endParaRPr lang="en-US" sz="1200"/>
           </a:p>
@@ -5420,7 +5420,7 @@
                 <a:ea typeface="Arial"/>
                 <a:cs typeface="Arial"/>
               </a:rPr>
-              <a:t xml:space="preserve">Source slide 10. 15:00 to 17:30</a:t>
+              <a:t xml:space="preserve">Source slide 10. 14:30 to 17:00</a:t>
             </a:r>
             <a:endParaRPr lang="en-US" sz="1200"/>
           </a:p>
@@ -5901,7 +5901,7 @@
                 <a:ea typeface="Arial"/>
                 <a:cs typeface="Arial"/>
               </a:rPr>
-              <a:t xml:space="preserve">Source slide 11. 17:30 to 21:00</a:t>
+              <a:t xml:space="preserve">Source slide 11. 17:00 to 20:00</a:t>
             </a:r>
             <a:endParaRPr lang="en-US" sz="1200"/>
           </a:p>
@@ -6816,7 +6816,7 @@
       </p:sp>
       <p:pic>
         <p:nvPicPr>
-          <p:cNvPr id="5" name="2c5fb820b277964d777498358b0962f4a0f45afc5a39c350b143fa7e45e40586" descr="Different priorities expose tradeoffs. Common requirements and checks apply to every candidate."/>
+          <p:cNvPr id="5" name="6df039e19b720a58c5dd5b0a6fd22802e6016f46ca549bd6fe67a83f688c07ac" descr="Cheap parallel generation produces candidates; shared gates reject before preference; cheap multi-model judges report disagreement rather than an average score."/>
           <p:cNvPicPr>
             <a:picLocks noChangeAspect="1"/>
           </p:cNvPicPr>
